--- a/markdown/files/slides/lecture22_concurrency1_mutualexclusion.pptx
+++ b/markdown/files/slides/lecture22_concurrency1_mutualexclusion.pptx
@@ -46,6 +46,15 @@
   </p:sldIdLst>
   <p:sldSz cx="12192000" cy="6858000"/>
   <p:notesSz cx="6858000" cy="9144000"/>
+  <p:embeddedFontLst>
+    <p:embeddedFont>
+      <p:font typeface="Consolas" panose="020B0609020204030204" pitchFamily="49" charset="0"/>
+      <p:regular r:id="rId38"/>
+      <p:bold r:id="rId39"/>
+      <p:italic r:id="rId40"/>
+      <p:boldItalic r:id="rId41"/>
+    </p:embeddedFont>
+  </p:embeddedFontLst>
   <p:defaultTextStyle>
     <a:defPPr>
       <a:defRPr lang="en-US"/>
@@ -5976,7 +5985,7 @@
       </p:sp>
       <p:grpSp>
         <p:nvGrpSpPr>
-          <p:cNvPr id="16" name="Group 15" descr="Now consider the following interleaving:&#10;&#10;First Thread1 executes:&#10;int b = getBalance();&#10;&#10;Next Thread 2 executes the entire body of withdraw&#10;&#10;Finally Thread 1 finishes its withdraw doing:&#10;if(amount &gt; b) {throw new Exception();}&#10;setBalance(b-amount);">
+          <p:cNvPr id="16" name="Group 15" descr="Now consider the following interleaving:&#10;&#10;First Thread1 executes:&#10;int b = getBalance();&#10;&#10;Next Thread 2 executes the entire body of withdraw&#10;&#10;Finally Thread 1 finishes its withdraw doing:&#10;if(amount &gt; b) {throw new Exception();}&#10;setBalance(b-amount);&#10;return amount;">
             <a:extLst>
               <a:ext uri="{FF2B5EF4-FFF2-40B4-BE49-F238E27FC236}">
                 <a16:creationId xmlns:a16="http://schemas.microsoft.com/office/drawing/2014/main" id="{CA326DC4-276C-E676-EA63-5E67F6491C43}"/>
@@ -6946,7 +6955,7 @@
       </p:sp>
       <p:grpSp>
         <p:nvGrpSpPr>
-          <p:cNvPr id="16" name="Group 15" descr="Consider the following interleaving:&#10;&#10;Thread 2 does the lines:&#10;if(amount &gt; getBalance()) {throw new Exception();}&#10;&#10;Then Thread 1 does:&#10;if(amount &gt; getBalance()) {throw new Exception();}&#10;followed by just the getBalance() call from the line: &#10;setBalance(getBalance()-amount);&#10;&#10;Then thread 2 does the whole line:&#10;setBalance(getBalance()-amount);&#10;&#10;And finally thread 1 finishes: setBalance(getBalance()-amount);&#10;using the already-computed result of getBalance()">
+          <p:cNvPr id="16" name="Group 15" descr="Consider the following interleaving:&#10;&#10;Thread 2 does the lines:&#10;if(amount &gt; getBalance()) {throw new Exception();}&#10;&#10;Then Thread 1 does:&#10;if(amount &gt; getBalance()) {throw new Exception();}&#10;followed by just the getBalance() call from the line: &#10;setBalance(getBalance()-amount);&#10;&#10;Then thread 2 does:&#10;setBalance(getBalance()-amount);&#10;return amount;&#10;&#10;And finally thread 1 finishes: setBalance(getBalance()-amount);&#10;return amount;&#10;using the already-computed result of getBalance()&#10;">
             <a:extLst>
               <a:ext uri="{FF2B5EF4-FFF2-40B4-BE49-F238E27FC236}">
                 <a16:creationId xmlns:a16="http://schemas.microsoft.com/office/drawing/2014/main" id="{4664EB9F-634F-29E4-B976-341C6A593C51}"/>
@@ -10955,447 +10964,454 @@
           </a:p>
         </p:txBody>
       </p:sp>
-      <p:sp>
-        <p:nvSpPr>
-          <p:cNvPr id="9" name="Rectangle 8">
+      <p:grpSp>
+        <p:nvGrpSpPr>
+          <p:cNvPr id="4" name="Group 3" descr="Consider the following interleaving:&#10;&#10;Thread 1 does the lines:&#10;try{&#10; lk.acquire(); &#10; int b = getBalance();&#10; if (amount &gt; b) &#10;  throw new Exception();&#10;&#10;&#10;Then Thread 2 does:&#10;int b = getBalance();&#10;setBalance(0);&#10;return b;&#10;&#10;Then thread 1 does:&#10;setBalance(b – amount); &#10; return amount;}&#10;finally { lk.release(); }">
             <a:extLst>
               <a:ext uri="{FF2B5EF4-FFF2-40B4-BE49-F238E27FC236}">
-                <a16:creationId xmlns:a16="http://schemas.microsoft.com/office/drawing/2014/main" id="{153111F2-E0CB-EFB9-CDFE-114A83873431}"/>
+                <a16:creationId xmlns:a16="http://schemas.microsoft.com/office/drawing/2014/main" id="{5814510E-F976-D890-0A8E-A37C2574CC73}"/>
               </a:ext>
             </a:extLst>
           </p:cNvPr>
-          <p:cNvSpPr/>
+          <p:cNvGrpSpPr/>
           <p:nvPr/>
-        </p:nvSpPr>
-        <p:spPr>
+        </p:nvGrpSpPr>
+        <p:grpSpPr>
           <a:xfrm>
-            <a:off x="1932064" y="2926080"/>
-            <a:ext cx="4325665" cy="3942081"/>
+            <a:off x="1932064" y="2915918"/>
+            <a:ext cx="8327872" cy="3952243"/>
+            <a:chOff x="1932064" y="2915918"/>
+            <a:chExt cx="8327872" cy="3952243"/>
           </a:xfrm>
-          <a:prstGeom prst="rect">
-            <a:avLst/>
-          </a:prstGeom>
-          <a:solidFill>
-            <a:schemeClr val="accent1">
-              <a:lumMod val="40000"/>
-              <a:lumOff val="60000"/>
-            </a:schemeClr>
-          </a:solidFill>
-          <a:ln>
+        </p:grpSpPr>
+        <p:sp>
+          <p:nvSpPr>
+            <p:cNvPr id="9" name="Rectangle 8">
+              <a:extLst>
+                <a:ext uri="{FF2B5EF4-FFF2-40B4-BE49-F238E27FC236}">
+                  <a16:creationId xmlns:a16="http://schemas.microsoft.com/office/drawing/2014/main" id="{153111F2-E0CB-EFB9-CDFE-114A83873431}"/>
+                </a:ext>
+              </a:extLst>
+            </p:cNvPr>
+            <p:cNvSpPr/>
+            <p:nvPr/>
+          </p:nvSpPr>
+          <p:spPr>
+            <a:xfrm>
+              <a:off x="1932064" y="2926080"/>
+              <a:ext cx="4325665" cy="3942081"/>
+            </a:xfrm>
+            <a:prstGeom prst="rect">
+              <a:avLst/>
+            </a:prstGeom>
             <a:solidFill>
-              <a:schemeClr val="tx1"/>
+              <a:schemeClr val="accent1">
+                <a:lumMod val="40000"/>
+                <a:lumOff val="60000"/>
+              </a:schemeClr>
             </a:solidFill>
-          </a:ln>
-        </p:spPr>
-        <p:style>
-          <a:lnRef idx="2">
-            <a:schemeClr val="accent1">
-              <a:shade val="15000"/>
-            </a:schemeClr>
-          </a:lnRef>
-          <a:fillRef idx="1">
-            <a:schemeClr val="accent1"/>
-          </a:fillRef>
-          <a:effectRef idx="0">
-            <a:schemeClr val="accent1"/>
-          </a:effectRef>
-          <a:fontRef idx="minor">
-            <a:schemeClr val="lt1"/>
-          </a:fontRef>
-        </p:style>
-        <p:txBody>
-          <a:bodyPr rtlCol="0" anchor="t"/>
-          <a:lstStyle/>
-          <a:p>
-            <a:pPr marL="0" indent="0">
-              <a:buNone/>
-            </a:pPr>
-            <a:r>
-              <a:rPr lang="en-US" dirty="0">
+            <a:ln>
+              <a:solidFill>
+                <a:schemeClr val="tx1"/>
+              </a:solidFill>
+            </a:ln>
+          </p:spPr>
+          <p:style>
+            <a:lnRef idx="2">
+              <a:schemeClr val="accent1">
+                <a:shade val="15000"/>
+              </a:schemeClr>
+            </a:lnRef>
+            <a:fillRef idx="1">
+              <a:schemeClr val="accent1"/>
+            </a:fillRef>
+            <a:effectRef idx="0">
+              <a:schemeClr val="accent1"/>
+            </a:effectRef>
+            <a:fontRef idx="minor">
+              <a:schemeClr val="lt1"/>
+            </a:fontRef>
+          </p:style>
+          <p:txBody>
+            <a:bodyPr rtlCol="0" anchor="t"/>
+            <a:lstStyle/>
+            <a:p>
+              <a:pPr marL="0" indent="0">
+                <a:buNone/>
+              </a:pPr>
+              <a:r>
+                <a:rPr lang="en-US" dirty="0">
+                  <a:solidFill>
+                    <a:schemeClr val="tx1"/>
+                  </a:solidFill>
+                </a:rPr>
+                <a:t>try{</a:t>
+              </a:r>
+            </a:p>
+            <a:p>
+              <a:pPr marL="0" indent="0">
+                <a:buNone/>
+              </a:pPr>
+              <a:r>
+                <a:rPr lang="en-US" dirty="0">
+                  <a:solidFill>
+                    <a:schemeClr val="tx1"/>
+                  </a:solidFill>
+                </a:rPr>
+                <a:t>	</a:t>
+              </a:r>
+              <a:r>
+                <a:rPr lang="en-US" dirty="0" err="1">
+                  <a:solidFill>
+                    <a:schemeClr val="tx1"/>
+                  </a:solidFill>
+                </a:rPr>
+                <a:t>lk.acquire</a:t>
+              </a:r>
+              <a:r>
+                <a:rPr lang="en-US" dirty="0">
+                  <a:solidFill>
+                    <a:schemeClr val="tx1"/>
+                  </a:solidFill>
+                </a:rPr>
+                <a:t>(); </a:t>
+              </a:r>
+            </a:p>
+            <a:p>
+              <a:pPr marL="0" indent="0">
+                <a:buNone/>
+              </a:pPr>
+              <a:r>
+                <a:rPr lang="en-US" dirty="0">
+                  <a:solidFill>
+                    <a:schemeClr val="tx1"/>
+                  </a:solidFill>
+                </a:rPr>
+                <a:t>	int b = </a:t>
+              </a:r>
+              <a:r>
+                <a:rPr lang="en-US" dirty="0" err="1">
+                  <a:solidFill>
+                    <a:schemeClr val="tx1"/>
+                  </a:solidFill>
+                </a:rPr>
+                <a:t>getBalance</a:t>
+              </a:r>
+              <a:r>
+                <a:rPr lang="en-US" dirty="0">
+                  <a:solidFill>
+                    <a:schemeClr val="tx1"/>
+                  </a:solidFill>
+                </a:rPr>
+                <a:t>();</a:t>
+              </a:r>
+            </a:p>
+            <a:p>
+              <a:pPr marL="0" indent="0">
+                <a:buNone/>
+              </a:pPr>
+              <a:r>
+                <a:rPr lang="en-US" dirty="0">
+                  <a:solidFill>
+                    <a:schemeClr val="tx1"/>
+                  </a:solidFill>
+                </a:rPr>
+                <a:t>	if (amount &gt; b) </a:t>
+              </a:r>
+            </a:p>
+            <a:p>
+              <a:pPr marL="0" indent="0">
+                <a:buNone/>
+              </a:pPr>
+              <a:r>
+                <a:rPr lang="en-US" dirty="0">
+                  <a:solidFill>
+                    <a:schemeClr val="tx1"/>
+                  </a:solidFill>
+                </a:rPr>
+                <a:t>		throw new Exception();</a:t>
+              </a:r>
+            </a:p>
+            <a:p>
+              <a:pPr marL="0" indent="0">
+                <a:buNone/>
+              </a:pPr>
+              <a:r>
+                <a:rPr lang="en-US" dirty="0">
+                  <a:solidFill>
+                    <a:schemeClr val="tx1"/>
+                  </a:solidFill>
+                </a:rPr>
+                <a:t> </a:t>
+              </a:r>
+            </a:p>
+            <a:p>
+              <a:pPr marL="0" indent="0">
+                <a:buNone/>
+              </a:pPr>
+              <a:r>
+                <a:rPr lang="en-US" dirty="0">
+                  <a:solidFill>
+                    <a:schemeClr val="tx1"/>
+                  </a:solidFill>
+                </a:rPr>
+                <a:t>	</a:t>
+              </a:r>
+            </a:p>
+            <a:p>
+              <a:pPr marL="0" indent="0">
+                <a:buNone/>
+              </a:pPr>
+              <a:r>
+                <a:rPr lang="en-US" dirty="0">
+                  <a:solidFill>
+                    <a:schemeClr val="tx1"/>
+                  </a:solidFill>
+                </a:rPr>
+                <a:t>	</a:t>
+              </a:r>
+            </a:p>
+            <a:p>
+              <a:pPr marL="0" indent="0">
+                <a:buNone/>
+              </a:pPr>
+              <a:r>
+                <a:rPr lang="en-US" dirty="0">
+                  <a:solidFill>
+                    <a:schemeClr val="tx1"/>
+                  </a:solidFill>
+                </a:rPr>
+                <a:t>	</a:t>
+              </a:r>
+              <a:r>
+                <a:rPr lang="en-US" dirty="0" err="1">
+                  <a:solidFill>
+                    <a:schemeClr val="tx1"/>
+                  </a:solidFill>
+                </a:rPr>
+                <a:t>setBalance</a:t>
+              </a:r>
+              <a:r>
+                <a:rPr lang="en-US" dirty="0">
+                  <a:solidFill>
+                    <a:schemeClr val="tx1"/>
+                  </a:solidFill>
+                </a:rPr>
+                <a:t>(b – amount); </a:t>
+              </a:r>
+            </a:p>
+            <a:p>
+              <a:pPr marL="0" indent="0">
+                <a:buNone/>
+              </a:pPr>
+              <a:r>
+                <a:rPr lang="en-US" dirty="0">
+                  <a:solidFill>
+                    <a:schemeClr val="tx1"/>
+                  </a:solidFill>
+                </a:rPr>
+                <a:t>	return amount;}</a:t>
+              </a:r>
+            </a:p>
+            <a:p>
+              <a:pPr marL="0" indent="0">
+                <a:buNone/>
+              </a:pPr>
+              <a:r>
+                <a:rPr lang="en-US" dirty="0">
+                  <a:solidFill>
+                    <a:schemeClr val="tx1"/>
+                  </a:solidFill>
+                </a:rPr>
+                <a:t>finally { </a:t>
+              </a:r>
+              <a:r>
+                <a:rPr lang="en-US" dirty="0" err="1">
+                  <a:solidFill>
+                    <a:schemeClr val="tx1"/>
+                  </a:solidFill>
+                </a:rPr>
+                <a:t>lk.release</a:t>
+              </a:r>
+              <a:r>
+                <a:rPr lang="en-US" dirty="0">
+                  <a:solidFill>
+                    <a:schemeClr val="tx1"/>
+                  </a:solidFill>
+                </a:rPr>
+                <a:t>(); }</a:t>
+              </a:r>
+            </a:p>
+          </p:txBody>
+        </p:sp>
+        <p:sp>
+          <p:nvSpPr>
+            <p:cNvPr id="11" name="Rectangle 10">
+              <a:extLst>
+                <a:ext uri="{FF2B5EF4-FFF2-40B4-BE49-F238E27FC236}">
+                  <a16:creationId xmlns:a16="http://schemas.microsoft.com/office/drawing/2014/main" id="{D99C9F9B-23B2-843A-E07D-0F90A5EC807E}"/>
+                </a:ext>
+              </a:extLst>
+            </p:cNvPr>
+            <p:cNvSpPr/>
+            <p:nvPr/>
+          </p:nvSpPr>
+          <p:spPr>
+            <a:xfrm>
+              <a:off x="6257728" y="2915918"/>
+              <a:ext cx="4002208" cy="3942081"/>
+            </a:xfrm>
+            <a:prstGeom prst="rect">
+              <a:avLst/>
+            </a:prstGeom>
+            <a:solidFill>
+              <a:schemeClr val="accent1">
+                <a:lumMod val="40000"/>
+                <a:lumOff val="60000"/>
+              </a:schemeClr>
+            </a:solidFill>
+            <a:ln>
+              <a:solidFill>
+                <a:schemeClr val="tx1"/>
+              </a:solidFill>
+            </a:ln>
+          </p:spPr>
+          <p:style>
+            <a:lnRef idx="2">
+              <a:schemeClr val="accent1">
+                <a:shade val="15000"/>
+              </a:schemeClr>
+            </a:lnRef>
+            <a:fillRef idx="1">
+              <a:schemeClr val="accent1"/>
+            </a:fillRef>
+            <a:effectRef idx="0">
+              <a:schemeClr val="accent1"/>
+            </a:effectRef>
+            <a:fontRef idx="minor">
+              <a:schemeClr val="lt1"/>
+            </a:fontRef>
+          </p:style>
+          <p:txBody>
+            <a:bodyPr rtlCol="0" anchor="t"/>
+            <a:lstStyle/>
+            <a:p>
+              <a:pPr marL="0" indent="0">
+                <a:buNone/>
+              </a:pPr>
+              <a:endParaRPr lang="en-US" dirty="0">
                 <a:solidFill>
                   <a:schemeClr val="tx1"/>
                 </a:solidFill>
-              </a:rPr>
-              <a:t>try{</a:t>
-            </a:r>
-          </a:p>
-          <a:p>
-            <a:pPr marL="0" indent="0">
-              <a:buNone/>
-            </a:pPr>
-            <a:r>
-              <a:rPr lang="en-US" dirty="0">
+              </a:endParaRPr>
+            </a:p>
+            <a:p>
+              <a:pPr marL="0" indent="0">
+                <a:buNone/>
+              </a:pPr>
+              <a:endParaRPr lang="en-US" dirty="0">
                 <a:solidFill>
                   <a:schemeClr val="tx1"/>
                 </a:solidFill>
-              </a:rPr>
-              <a:t>	</a:t>
-            </a:r>
-            <a:r>
-              <a:rPr lang="en-US" dirty="0" err="1">
+              </a:endParaRPr>
+            </a:p>
+            <a:p>
+              <a:pPr marL="0" indent="0">
+                <a:buNone/>
+              </a:pPr>
+              <a:endParaRPr lang="en-US" dirty="0">
                 <a:solidFill>
                   <a:schemeClr val="tx1"/>
                 </a:solidFill>
-              </a:rPr>
-              <a:t>lk.acquire</a:t>
-            </a:r>
-            <a:r>
-              <a:rPr lang="en-US" dirty="0">
+              </a:endParaRPr>
+            </a:p>
+            <a:p>
+              <a:pPr marL="0" indent="0">
+                <a:buNone/>
+              </a:pPr>
+              <a:endParaRPr lang="en-US" dirty="0">
                 <a:solidFill>
                   <a:schemeClr val="tx1"/>
                 </a:solidFill>
-              </a:rPr>
-              <a:t>(); </a:t>
-            </a:r>
-          </a:p>
-          <a:p>
-            <a:pPr marL="0" indent="0">
-              <a:buNone/>
-            </a:pPr>
-            <a:r>
-              <a:rPr lang="en-US" dirty="0">
+              </a:endParaRPr>
+            </a:p>
+            <a:p>
+              <a:pPr marL="0" indent="0">
+                <a:buNone/>
+              </a:pPr>
+              <a:endParaRPr lang="en-US" dirty="0">
                 <a:solidFill>
                   <a:schemeClr val="tx1"/>
                 </a:solidFill>
-              </a:rPr>
-              <a:t>	int b = </a:t>
-            </a:r>
-            <a:r>
-              <a:rPr lang="en-US" dirty="0" err="1">
+              </a:endParaRPr>
+            </a:p>
+            <a:p>
+              <a:pPr marL="0" indent="0">
+                <a:buNone/>
+              </a:pPr>
+              <a:r>
+                <a:rPr lang="en-US" dirty="0">
+                  <a:solidFill>
+                    <a:schemeClr val="tx1"/>
+                  </a:solidFill>
+                </a:rPr>
+                <a:t>int b = </a:t>
+              </a:r>
+              <a:r>
+                <a:rPr lang="en-US" dirty="0" err="1">
+                  <a:solidFill>
+                    <a:schemeClr val="tx1"/>
+                  </a:solidFill>
+                </a:rPr>
+                <a:t>getBalance</a:t>
+              </a:r>
+              <a:r>
+                <a:rPr lang="en-US" dirty="0">
+                  <a:solidFill>
+                    <a:schemeClr val="tx1"/>
+                  </a:solidFill>
+                </a:rPr>
+                <a:t>();</a:t>
+              </a:r>
+            </a:p>
+            <a:p>
+              <a:r>
+                <a:rPr lang="en-US" dirty="0" err="1">
+                  <a:solidFill>
+                    <a:schemeClr val="tx1"/>
+                  </a:solidFill>
+                </a:rPr>
+                <a:t>setBalance</a:t>
+              </a:r>
+              <a:r>
+                <a:rPr lang="en-US" dirty="0">
+                  <a:solidFill>
+                    <a:schemeClr val="tx1"/>
+                  </a:solidFill>
+                </a:rPr>
+                <a:t>(0);</a:t>
+              </a:r>
+            </a:p>
+            <a:p>
+              <a:r>
+                <a:rPr lang="en-US" dirty="0">
+                  <a:solidFill>
+                    <a:schemeClr val="tx1"/>
+                  </a:solidFill>
+                </a:rPr>
+                <a:t>return b;</a:t>
+              </a:r>
+            </a:p>
+            <a:p>
+              <a:endParaRPr lang="en-US" dirty="0">
                 <a:solidFill>
                   <a:schemeClr val="tx1"/>
                 </a:solidFill>
-              </a:rPr>
-              <a:t>getBalance</a:t>
-            </a:r>
-            <a:r>
-              <a:rPr lang="en-US" dirty="0">
-                <a:solidFill>
-                  <a:schemeClr val="tx1"/>
-                </a:solidFill>
-              </a:rPr>
-              <a:t>();</a:t>
-            </a:r>
-          </a:p>
-          <a:p>
-            <a:pPr marL="0" indent="0">
-              <a:buNone/>
-            </a:pPr>
-            <a:r>
-              <a:rPr lang="en-US" dirty="0">
-                <a:solidFill>
-                  <a:schemeClr val="tx1"/>
-                </a:solidFill>
-              </a:rPr>
-              <a:t>	if (amount &gt; b) </a:t>
-            </a:r>
-          </a:p>
-          <a:p>
-            <a:pPr marL="0" indent="0">
-              <a:buNone/>
-            </a:pPr>
-            <a:r>
-              <a:rPr lang="en-US" dirty="0">
-                <a:solidFill>
-                  <a:schemeClr val="tx1"/>
-                </a:solidFill>
-              </a:rPr>
-              <a:t>		throw new Exception();</a:t>
-            </a:r>
-          </a:p>
-          <a:p>
-            <a:pPr marL="0" indent="0">
-              <a:buNone/>
-            </a:pPr>
-            <a:r>
-              <a:rPr lang="en-US" dirty="0">
-                <a:solidFill>
-                  <a:schemeClr val="tx1"/>
-                </a:solidFill>
-              </a:rPr>
-              <a:t> </a:t>
-            </a:r>
-          </a:p>
-          <a:p>
-            <a:pPr marL="0" indent="0">
-              <a:buNone/>
-            </a:pPr>
-            <a:r>
-              <a:rPr lang="en-US" dirty="0">
-                <a:solidFill>
-                  <a:schemeClr val="tx1"/>
-                </a:solidFill>
-              </a:rPr>
-              <a:t>	</a:t>
-            </a:r>
-            <a:r>
-              <a:rPr lang="en-US" dirty="0" err="1">
-                <a:solidFill>
-                  <a:schemeClr val="tx1"/>
-                </a:solidFill>
-              </a:rPr>
-              <a:t>setBalance</a:t>
-            </a:r>
-            <a:r>
-              <a:rPr lang="en-US" dirty="0">
-                <a:solidFill>
-                  <a:schemeClr val="tx1"/>
-                </a:solidFill>
-              </a:rPr>
-              <a:t>(b – amount); </a:t>
-            </a:r>
-          </a:p>
-          <a:p>
-            <a:pPr marL="0" indent="0">
-              <a:buNone/>
-            </a:pPr>
-            <a:r>
-              <a:rPr lang="en-US" dirty="0">
-                <a:solidFill>
-                  <a:schemeClr val="tx1"/>
-                </a:solidFill>
-              </a:rPr>
-              <a:t>	return amount;}</a:t>
-            </a:r>
-          </a:p>
-          <a:p>
-            <a:pPr marL="0" indent="0">
-              <a:buNone/>
-            </a:pPr>
-            <a:endParaRPr lang="en-US" dirty="0">
-              <a:solidFill>
-                <a:schemeClr val="tx1"/>
-              </a:solidFill>
-            </a:endParaRPr>
-          </a:p>
-          <a:p>
-            <a:pPr marL="0" indent="0">
-              <a:buNone/>
-            </a:pPr>
-            <a:endParaRPr lang="en-US" dirty="0">
-              <a:solidFill>
-                <a:schemeClr val="tx1"/>
-              </a:solidFill>
-            </a:endParaRPr>
-          </a:p>
-          <a:p>
-            <a:pPr marL="0" indent="0">
-              <a:buNone/>
-            </a:pPr>
-            <a:r>
-              <a:rPr lang="en-US" dirty="0">
-                <a:solidFill>
-                  <a:schemeClr val="tx1"/>
-                </a:solidFill>
-              </a:rPr>
-              <a:t>finally { </a:t>
-            </a:r>
-            <a:r>
-              <a:rPr lang="en-US" dirty="0" err="1">
-                <a:solidFill>
-                  <a:schemeClr val="tx1"/>
-                </a:solidFill>
-              </a:rPr>
-              <a:t>lk.release</a:t>
-            </a:r>
-            <a:r>
-              <a:rPr lang="en-US" dirty="0">
-                <a:solidFill>
-                  <a:schemeClr val="tx1"/>
-                </a:solidFill>
-              </a:rPr>
-              <a:t>(); }</a:t>
-            </a:r>
-          </a:p>
-        </p:txBody>
-      </p:sp>
-      <p:sp>
-        <p:nvSpPr>
-          <p:cNvPr id="11" name="Rectangle 10">
-            <a:extLst>
-              <a:ext uri="{FF2B5EF4-FFF2-40B4-BE49-F238E27FC236}">
-                <a16:creationId xmlns:a16="http://schemas.microsoft.com/office/drawing/2014/main" id="{D99C9F9B-23B2-843A-E07D-0F90A5EC807E}"/>
-              </a:ext>
-            </a:extLst>
-          </p:cNvPr>
-          <p:cNvSpPr/>
-          <p:nvPr/>
-        </p:nvSpPr>
-        <p:spPr>
-          <a:xfrm>
-            <a:off x="6257728" y="2915918"/>
-            <a:ext cx="4002208" cy="3942081"/>
-          </a:xfrm>
-          <a:prstGeom prst="rect">
-            <a:avLst/>
-          </a:prstGeom>
-          <a:solidFill>
-            <a:schemeClr val="accent1">
-              <a:lumMod val="40000"/>
-              <a:lumOff val="60000"/>
-            </a:schemeClr>
-          </a:solidFill>
-          <a:ln>
-            <a:solidFill>
-              <a:schemeClr val="tx1"/>
-            </a:solidFill>
-          </a:ln>
-        </p:spPr>
-        <p:style>
-          <a:lnRef idx="2">
-            <a:schemeClr val="accent1">
-              <a:shade val="15000"/>
-            </a:schemeClr>
-          </a:lnRef>
-          <a:fillRef idx="1">
-            <a:schemeClr val="accent1"/>
-          </a:fillRef>
-          <a:effectRef idx="0">
-            <a:schemeClr val="accent1"/>
-          </a:effectRef>
-          <a:fontRef idx="minor">
-            <a:schemeClr val="lt1"/>
-          </a:fontRef>
-        </p:style>
-        <p:txBody>
-          <a:bodyPr rtlCol="0" anchor="t"/>
-          <a:lstStyle/>
-          <a:p>
-            <a:pPr marL="0" indent="0">
-              <a:buNone/>
-            </a:pPr>
-            <a:endParaRPr lang="en-US" dirty="0">
-              <a:solidFill>
-                <a:schemeClr val="tx1"/>
-              </a:solidFill>
-            </a:endParaRPr>
-          </a:p>
-          <a:p>
-            <a:pPr marL="0" indent="0">
-              <a:buNone/>
-            </a:pPr>
-            <a:endParaRPr lang="en-US" dirty="0">
-              <a:solidFill>
-                <a:schemeClr val="tx1"/>
-              </a:solidFill>
-            </a:endParaRPr>
-          </a:p>
-          <a:p>
-            <a:pPr marL="0" indent="0">
-              <a:buNone/>
-            </a:pPr>
-            <a:endParaRPr lang="en-US" dirty="0">
-              <a:solidFill>
-                <a:schemeClr val="tx1"/>
-              </a:solidFill>
-            </a:endParaRPr>
-          </a:p>
-          <a:p>
-            <a:pPr marL="0" indent="0">
-              <a:buNone/>
-            </a:pPr>
-            <a:endParaRPr lang="en-US" dirty="0">
-              <a:solidFill>
-                <a:schemeClr val="tx1"/>
-              </a:solidFill>
-            </a:endParaRPr>
-          </a:p>
-          <a:p>
-            <a:pPr marL="0" indent="0">
-              <a:buNone/>
-            </a:pPr>
-            <a:endParaRPr lang="en-US" dirty="0">
-              <a:solidFill>
-                <a:schemeClr val="tx1"/>
-              </a:solidFill>
-            </a:endParaRPr>
-          </a:p>
-          <a:p>
-            <a:pPr marL="0" indent="0">
-              <a:buNone/>
-            </a:pPr>
-            <a:r>
-              <a:rPr lang="en-US" dirty="0">
-                <a:solidFill>
-                  <a:schemeClr val="tx1"/>
-                </a:solidFill>
-              </a:rPr>
-              <a:t>int b = </a:t>
-            </a:r>
-            <a:r>
-              <a:rPr lang="en-US" dirty="0" err="1">
-                <a:solidFill>
-                  <a:schemeClr val="tx1"/>
-                </a:solidFill>
-              </a:rPr>
-              <a:t>getBalance</a:t>
-            </a:r>
-            <a:r>
-              <a:rPr lang="en-US" dirty="0">
-                <a:solidFill>
-                  <a:schemeClr val="tx1"/>
-                </a:solidFill>
-              </a:rPr>
-              <a:t>();</a:t>
-            </a:r>
-          </a:p>
-          <a:p>
-            <a:pPr marL="0" indent="0">
-              <a:buNone/>
-            </a:pPr>
-            <a:endParaRPr lang="en-US" dirty="0">
-              <a:solidFill>
-                <a:schemeClr val="tx1"/>
-              </a:solidFill>
-            </a:endParaRPr>
-          </a:p>
-          <a:p>
-            <a:pPr marL="0" indent="0">
-              <a:buNone/>
-            </a:pPr>
-            <a:endParaRPr lang="en-US" dirty="0">
-              <a:solidFill>
-                <a:schemeClr val="tx1"/>
-              </a:solidFill>
-            </a:endParaRPr>
-          </a:p>
-          <a:p>
-            <a:r>
-              <a:rPr lang="en-US" dirty="0" err="1">
-                <a:solidFill>
-                  <a:schemeClr val="tx1"/>
-                </a:solidFill>
-              </a:rPr>
-              <a:t>setBalance</a:t>
-            </a:r>
-            <a:r>
-              <a:rPr lang="en-US" dirty="0">
-                <a:solidFill>
-                  <a:schemeClr val="tx1"/>
-                </a:solidFill>
-              </a:rPr>
-              <a:t>(0);</a:t>
-            </a:r>
-          </a:p>
-          <a:p>
-            <a:r>
-              <a:rPr lang="en-US" dirty="0">
-                <a:solidFill>
-                  <a:schemeClr val="tx1"/>
-                </a:solidFill>
-              </a:rPr>
-              <a:t>return b;</a:t>
-            </a:r>
-          </a:p>
-          <a:p>
-            <a:endParaRPr lang="en-US" dirty="0">
-              <a:solidFill>
-                <a:schemeClr val="tx1"/>
-              </a:solidFill>
-            </a:endParaRPr>
-          </a:p>
-        </p:txBody>
-      </p:sp>
+              </a:endParaRPr>
+            </a:p>
+          </p:txBody>
+        </p:sp>
+      </p:grpSp>
     </p:spTree>
     <p:extLst>
       <p:ext uri="{BB962C8B-B14F-4D97-AF65-F5344CB8AC3E}">
@@ -11442,14 +11458,19 @@
             <p:ph type="title"/>
           </p:nvPr>
         </p:nvSpPr>
-        <p:spPr/>
+        <p:spPr>
+          <a:xfrm>
+            <a:off x="274320" y="365125"/>
+            <a:ext cx="11643360" cy="1325563"/>
+          </a:xfrm>
+        </p:spPr>
         <p:txBody>
           <a:bodyPr/>
           <a:lstStyle/>
           <a:p>
             <a:r>
               <a:rPr lang="en-US" dirty="0"/>
-              <a:t>All methods using balance need the lock</a:t>
+              <a:t>Solution: All methods using balance need the lock</a:t>
             </a:r>
           </a:p>
         </p:txBody>
@@ -13048,7 +13069,12 @@
             <p:ph idx="1"/>
           </p:nvPr>
         </p:nvSpPr>
-        <p:spPr/>
+        <p:spPr>
+          <a:xfrm>
+            <a:off x="838200" y="1825625"/>
+            <a:ext cx="11083834" cy="4351338"/>
+          </a:xfrm>
+        </p:spPr>
         <p:txBody>
           <a:bodyPr>
             <a:normAutofit fontScale="92500" lnSpcReduction="10000"/>
@@ -13074,8 +13100,27 @@
           <a:p>
             <a:r>
               <a:rPr lang="en-US" dirty="0"/>
-              <a:t>Syntax:</a:t>
-            </a:r>
+              <a:t>Syntax: </a:t>
+            </a:r>
+            <a:r>
+              <a:rPr lang="en-US" sz="2600" dirty="0">
+                <a:solidFill>
+                  <a:schemeClr val="accent1">
+                    <a:lumMod val="75000"/>
+                  </a:schemeClr>
+                </a:solidFill>
+                <a:latin typeface="Consolas" panose="020B0609020204030204" pitchFamily="49" charset="0"/>
+              </a:rPr>
+              <a:t>synchronized(/*expression returning an Object*/) {…}</a:t>
+            </a:r>
+            <a:endParaRPr lang="en-US" dirty="0">
+              <a:solidFill>
+                <a:schemeClr val="accent1">
+                  <a:lumMod val="75000"/>
+                </a:schemeClr>
+              </a:solidFill>
+              <a:latin typeface="Consolas" panose="020B0609020204030204" pitchFamily="49" charset="0"/>
+            </a:endParaRPr>
           </a:p>
           <a:p>
             <a:r>
@@ -13131,46 +13176,6 @@
           </a:p>
           <a:p>
             <a:endParaRPr lang="en-US" dirty="0"/>
-          </a:p>
-        </p:txBody>
-      </p:sp>
-      <p:sp>
-        <p:nvSpPr>
-          <p:cNvPr id="4" name="TextBox 3">
-            <a:extLst>
-              <a:ext uri="{FF2B5EF4-FFF2-40B4-BE49-F238E27FC236}">
-                <a16:creationId xmlns:a16="http://schemas.microsoft.com/office/drawing/2014/main" id="{0F5D1961-CD41-26DA-F57A-3D4184303799}"/>
-              </a:ext>
-            </a:extLst>
-          </p:cNvPr>
-          <p:cNvSpPr txBox="1"/>
-          <p:nvPr/>
-        </p:nvSpPr>
-        <p:spPr>
-          <a:xfrm>
-            <a:off x="2296160" y="3012440"/>
-            <a:ext cx="6305893" cy="369332"/>
-          </a:xfrm>
-          <a:prstGeom prst="rect">
-            <a:avLst/>
-          </a:prstGeom>
-          <a:solidFill>
-            <a:schemeClr val="accent1">
-              <a:lumMod val="40000"/>
-              <a:lumOff val="60000"/>
-            </a:schemeClr>
-          </a:solidFill>
-        </p:spPr>
-        <p:txBody>
-          <a:bodyPr wrap="none" rtlCol="0">
-            <a:spAutoFit/>
-          </a:bodyPr>
-          <a:lstStyle/>
-          <a:p>
-            <a:r>
-              <a:rPr lang="en-US" dirty="0"/>
-              <a:t>synchronized( /* expression returning an Object */ ) {statements}</a:t>
-            </a:r>
           </a:p>
         </p:txBody>
       </p:sp>
